--- a/dist/초2/수학/도형과측정/초2_수학_도형과측정_06_달력보기.pptx
+++ b/dist/초2/수학/도형과측정/초2_수학_도형과측정_06_달력보기.pptx
@@ -121,13 +121,13 @@
   <p:extLst>
     <p:ext uri="{521415D9-36F7-43E2-AB2F-B90AF26B5E84}">
       <p14:sectionLst xmlns:p14="http://schemas.microsoft.com/office/powerpoint/2010/main">
-        <p14:section name="도입" id="{9268e2b3-741a-e3da-dd5f-26e335f7ffea}">
+        <p14:section name="도입" id="{691eb8b8-7351-fc74-3af1-77a795a74290}">
           <p14:sldIdLst>
             <p14:sldId id="256"/>
             <p14:sldId id="257"/>
           </p14:sldIdLst>
         </p14:section>
-        <p14:section name="개념" id="{9ebffda1-3be9-8554-c996-4b4a0f356b01}">
+        <p14:section name="개념" id="{327e39a6-969b-2365-4383-029d4cb209c6}">
           <p14:sldIdLst>
             <p14:sldId id="258"/>
             <p14:sldId id="259"/>
@@ -136,32 +136,32 @@
             <p14:sldId id="264"/>
           </p14:sldIdLst>
         </p14:section>
-        <p14:section name="연습" id="{2570ae17-53be-e65d-b0f2-541c1b3f840b}">
+        <p14:section name="연습" id="{9ebe3560-02dd-784a-dfa2-a00741508061}">
           <p14:sldIdLst>
             <p14:sldId id="261"/>
             <p14:sldId id="262"/>
             <p14:sldId id="265"/>
           </p14:sldIdLst>
         </p14:section>
-        <p14:section name="개념" id="{54a6f045-5ae7-b725-3407-f06711e5e88c}">
+        <p14:section name="개념" id="{28dc8de6-ee49-9aa6-1ccd-ef58999e6436}">
           <p14:sldIdLst/>
         </p14:section>
-        <p14:section name="연습" id="{d29518d5-f450-a610-65a8-2d18025f1edd}">
+        <p14:section name="연습" id="{1729a561-31e8-0b5a-0c20-d3fcdf961f53}">
           <p14:sldIdLst/>
         </p14:section>
-        <p14:section name="확인" id="{aad0efd7-a694-b73e-ab13-4c280eb8bd09}">
+        <p14:section name="확인" id="{84163f0a-8654-92b5-0407-9e320373d559}">
           <p14:sldIdLst>
             <p14:sldId id="266"/>
             <p14:sldId id="267"/>
             <p14:sldId id="268"/>
           </p14:sldIdLst>
         </p14:section>
-        <p14:section name="정리" id="{d5286408-cc39-e354-4d41-cbaeb8341a51}">
+        <p14:section name="정리" id="{2481ea8a-f828-7c8f-764f-33040e2319cd}">
           <p14:sldIdLst>
             <p14:sldId id="269"/>
           </p14:sldIdLst>
         </p14:section>
-        <p14:section name="보충" id="{5cde69f6-7787-eef6-58e5-5e8410d643a4}">
+        <p14:section name="보충" id="{109a8a33-a6c9-44b3-2364-960480d9e8f2}">
           <p14:sldIdLst>
             <p14:sldId id="270"/>
           </p14:sldIdLst>
@@ -3156,7 +3156,7 @@
           </p:nvPr>
         </p:nvGraphicFramePr>
         <p:xfrm>
-          <a:off x="7680960" y="1645920"/>
+          <a:off x="7680960" y="1670050"/>
           <a:ext cx="3931920" cy="914400"/>
         </p:xfrm>
         <a:graphic>
@@ -3172,7 +3172,7 @@
                 <a:gridCol w="561703"/>
                 <a:gridCol w="561703"/>
               </a:tblGrid>
-              <a:tr h="457200">
+              <a:tr h="433070">
                 <a:tc>
                   <a:txBody>
                     <a:bodyPr/>
@@ -3650,7 +3650,7 @@
                   </a:tcPr>
                 </a:tc>
               </a:tr>
-              <a:tr h="457200">
+              <a:tr h="433070">
                 <a:tc>
                   <a:txBody>
                     <a:bodyPr/>
@@ -4888,7 +4888,7 @@
           </p:nvPr>
         </p:nvGraphicFramePr>
         <p:xfrm>
-          <a:off x="6398514" y="2529840"/>
+          <a:off x="6398514" y="2579370"/>
           <a:ext cx="5120640" cy="914400"/>
         </p:xfrm>
         <a:graphic>
@@ -4904,7 +4904,7 @@
                 <a:gridCol w="731520"/>
                 <a:gridCol w="731520"/>
               </a:tblGrid>
-              <a:tr h="528320">
+              <a:tr h="511810">
                 <a:tc>
                   <a:txBody>
                     <a:bodyPr/>
@@ -5382,7 +5382,7 @@
                   </a:tcPr>
                 </a:tc>
               </a:tr>
-              <a:tr h="528320">
+              <a:tr h="511810">
                 <a:tc>
                   <a:txBody>
                     <a:bodyPr/>
@@ -5827,7 +5827,7 @@
                   </a:tcPr>
                 </a:tc>
               </a:tr>
-              <a:tr h="528320">
+              <a:tr h="511810">
                 <a:tc>
                   <a:txBody>
                     <a:bodyPr/>
@@ -6305,7 +6305,7 @@
                   </a:tcPr>
                 </a:tc>
               </a:tr>
-              <a:tr h="528320">
+              <a:tr h="511810">
                 <a:tc>
                   <a:txBody>
                     <a:bodyPr/>
@@ -6783,7 +6783,7 @@
                   </a:tcPr>
                 </a:tc>
               </a:tr>
-              <a:tr h="528320">
+              <a:tr h="511810">
                 <a:tc>
                   <a:txBody>
                     <a:bodyPr/>
@@ -7261,7 +7261,7 @@
                   </a:tcPr>
                 </a:tc>
               </a:tr>
-              <a:tr h="528320">
+              <a:tr h="511810">
                 <a:tc>
                   <a:txBody>
                     <a:bodyPr/>
@@ -11361,7 +11361,7 @@
           </p:nvPr>
         </p:nvGraphicFramePr>
         <p:xfrm>
-          <a:off x="2253996" y="1420622"/>
+          <a:off x="2253996" y="1470152"/>
           <a:ext cx="7680960" cy="914400"/>
         </p:xfrm>
         <a:graphic>
@@ -11377,7 +11377,7 @@
                 <a:gridCol w="1097280"/>
                 <a:gridCol w="1097280"/>
               </a:tblGrid>
-              <a:tr h="528320">
+              <a:tr h="511810">
                 <a:tc>
                   <a:txBody>
                     <a:bodyPr/>
@@ -11855,7 +11855,7 @@
                   </a:tcPr>
                 </a:tc>
               </a:tr>
-              <a:tr h="528320">
+              <a:tr h="511810">
                 <a:tc>
                   <a:txBody>
                     <a:bodyPr/>
@@ -12300,7 +12300,7 @@
                   </a:tcPr>
                 </a:tc>
               </a:tr>
-              <a:tr h="528320">
+              <a:tr h="511810">
                 <a:tc>
                   <a:txBody>
                     <a:bodyPr/>
@@ -12778,7 +12778,7 @@
                   </a:tcPr>
                 </a:tc>
               </a:tr>
-              <a:tr h="528320">
+              <a:tr h="511810">
                 <a:tc>
                   <a:txBody>
                     <a:bodyPr/>
@@ -13256,7 +13256,7 @@
                   </a:tcPr>
                 </a:tc>
               </a:tr>
-              <a:tr h="528320">
+              <a:tr h="511810">
                 <a:tc>
                   <a:txBody>
                     <a:bodyPr/>
@@ -13734,7 +13734,7 @@
                   </a:tcPr>
                 </a:tc>
               </a:tr>
-              <a:tr h="528320">
+              <a:tr h="511810">
                 <a:tc>
                   <a:txBody>
                     <a:bodyPr/>
@@ -14362,7 +14362,7 @@
           </p:nvPr>
         </p:nvGraphicFramePr>
         <p:xfrm>
-          <a:off x="6398514" y="2827020"/>
+          <a:off x="6398514" y="2876550"/>
           <a:ext cx="5120640" cy="914400"/>
         </p:xfrm>
         <a:graphic>
@@ -14378,7 +14378,7 @@
                 <a:gridCol w="731520"/>
                 <a:gridCol w="731520"/>
               </a:tblGrid>
-              <a:tr h="528320">
+              <a:tr h="511810">
                 <a:tc>
                   <a:txBody>
                     <a:bodyPr/>
@@ -14856,7 +14856,7 @@
                   </a:tcPr>
                 </a:tc>
               </a:tr>
-              <a:tr h="528320">
+              <a:tr h="511810">
                 <a:tc>
                   <a:txBody>
                     <a:bodyPr/>
@@ -15301,7 +15301,7 @@
                   </a:tcPr>
                 </a:tc>
               </a:tr>
-              <a:tr h="528320">
+              <a:tr h="511810">
                 <a:tc>
                   <a:txBody>
                     <a:bodyPr/>
@@ -15779,7 +15779,7 @@
                   </a:tcPr>
                 </a:tc>
               </a:tr>
-              <a:tr h="528320">
+              <a:tr h="511810">
                 <a:tc>
                   <a:txBody>
                     <a:bodyPr/>
@@ -16257,7 +16257,7 @@
                   </a:tcPr>
                 </a:tc>
               </a:tr>
-              <a:tr h="528320">
+              <a:tr h="511810">
                 <a:tc>
                   <a:txBody>
                     <a:bodyPr/>
@@ -16735,7 +16735,7 @@
                   </a:tcPr>
                 </a:tc>
               </a:tr>
-              <a:tr h="528320">
+              <a:tr h="511810">
                 <a:tc>
                   <a:txBody>
                     <a:bodyPr/>
@@ -19292,7 +19292,7 @@
           </p:nvPr>
         </p:nvGraphicFramePr>
         <p:xfrm>
-          <a:off x="6398514" y="2103120"/>
+          <a:off x="6398514" y="2030730"/>
           <a:ext cx="5120640" cy="914400"/>
         </p:xfrm>
         <a:graphic>
@@ -19308,7 +19308,7 @@
                 <a:gridCol w="731520"/>
                 <a:gridCol w="731520"/>
               </a:tblGrid>
-              <a:tr h="487680">
+              <a:tr h="511810">
                 <a:tc>
                   <a:txBody>
                     <a:bodyPr/>
@@ -19318,7 +19318,7 @@
                         <a:buNone/>
                       </a:pPr>
                       <a:r>
-                        <a:rPr lang="en-US" sz="2400" b="1" dirty="0">
+                        <a:rPr lang="en-US" sz="2600" b="1" dirty="0">
                           <a:solidFill>
                             <a:srgbClr val="1F2937"/>
                           </a:solidFill>
@@ -19328,7 +19328,7 @@
                         </a:rPr>
                         <a:t>일</a:t>
                       </a:r>
-                      <a:endParaRPr lang="en-US" sz="2400" dirty="0">
+                      <a:endParaRPr lang="en-US" sz="2600" dirty="0">
                         <a:latin typeface="맑은 고딕" charset="0"/>
                         <a:ea typeface="맑은 고딕" charset="0"/>
                         <a:cs typeface="맑은 고딕" charset="0"/>
@@ -19386,7 +19386,7 @@
                         <a:buNone/>
                       </a:pPr>
                       <a:r>
-                        <a:rPr lang="en-US" sz="2400" b="1" dirty="0">
+                        <a:rPr lang="en-US" sz="2600" b="1" dirty="0">
                           <a:solidFill>
                             <a:srgbClr val="1F2937"/>
                           </a:solidFill>
@@ -19396,7 +19396,7 @@
                         </a:rPr>
                         <a:t>월</a:t>
                       </a:r>
-                      <a:endParaRPr lang="en-US" sz="2400" dirty="0">
+                      <a:endParaRPr lang="en-US" sz="2600" dirty="0">
                         <a:latin typeface="맑은 고딕" charset="0"/>
                         <a:ea typeface="맑은 고딕" charset="0"/>
                         <a:cs typeface="맑은 고딕" charset="0"/>
@@ -19454,7 +19454,7 @@
                         <a:buNone/>
                       </a:pPr>
                       <a:r>
-                        <a:rPr lang="en-US" sz="2400" b="1" dirty="0">
+                        <a:rPr lang="en-US" sz="2600" b="1" dirty="0">
                           <a:solidFill>
                             <a:srgbClr val="1F2937"/>
                           </a:solidFill>
@@ -19464,7 +19464,7 @@
                         </a:rPr>
                         <a:t>화</a:t>
                       </a:r>
-                      <a:endParaRPr lang="en-US" sz="2400" dirty="0">
+                      <a:endParaRPr lang="en-US" sz="2600" dirty="0">
                         <a:latin typeface="맑은 고딕" charset="0"/>
                         <a:ea typeface="맑은 고딕" charset="0"/>
                         <a:cs typeface="맑은 고딕" charset="0"/>
@@ -19522,7 +19522,7 @@
                         <a:buNone/>
                       </a:pPr>
                       <a:r>
-                        <a:rPr lang="en-US" sz="2400" b="1" dirty="0">
+                        <a:rPr lang="en-US" sz="2600" b="1" dirty="0">
                           <a:solidFill>
                             <a:srgbClr val="1F2937"/>
                           </a:solidFill>
@@ -19532,7 +19532,7 @@
                         </a:rPr>
                         <a:t>수</a:t>
                       </a:r>
-                      <a:endParaRPr lang="en-US" sz="2400" dirty="0">
+                      <a:endParaRPr lang="en-US" sz="2600" dirty="0">
                         <a:latin typeface="맑은 고딕" charset="0"/>
                         <a:ea typeface="맑은 고딕" charset="0"/>
                         <a:cs typeface="맑은 고딕" charset="0"/>
@@ -19590,7 +19590,7 @@
                         <a:buNone/>
                       </a:pPr>
                       <a:r>
-                        <a:rPr lang="en-US" sz="2400" b="1" dirty="0">
+                        <a:rPr lang="en-US" sz="2600" b="1" dirty="0">
                           <a:solidFill>
                             <a:srgbClr val="1F2937"/>
                           </a:solidFill>
@@ -19600,7 +19600,7 @@
                         </a:rPr>
                         <a:t>목</a:t>
                       </a:r>
-                      <a:endParaRPr lang="en-US" sz="2400" dirty="0">
+                      <a:endParaRPr lang="en-US" sz="2600" dirty="0">
                         <a:latin typeface="맑은 고딕" charset="0"/>
                         <a:ea typeface="맑은 고딕" charset="0"/>
                         <a:cs typeface="맑은 고딕" charset="0"/>
@@ -19658,7 +19658,7 @@
                         <a:buNone/>
                       </a:pPr>
                       <a:r>
-                        <a:rPr lang="en-US" sz="2400" b="1" dirty="0">
+                        <a:rPr lang="en-US" sz="2600" b="1" dirty="0">
                           <a:solidFill>
                             <a:srgbClr val="1F2937"/>
                           </a:solidFill>
@@ -19668,7 +19668,7 @@
                         </a:rPr>
                         <a:t>금</a:t>
                       </a:r>
-                      <a:endParaRPr lang="en-US" sz="2400" dirty="0">
+                      <a:endParaRPr lang="en-US" sz="2600" dirty="0">
                         <a:latin typeface="맑은 고딕" charset="0"/>
                         <a:ea typeface="맑은 고딕" charset="0"/>
                         <a:cs typeface="맑은 고딕" charset="0"/>
@@ -19726,7 +19726,7 @@
                         <a:buNone/>
                       </a:pPr>
                       <a:r>
-                        <a:rPr lang="en-US" sz="2400" b="1" dirty="0">
+                        <a:rPr lang="en-US" sz="2600" b="1" dirty="0">
                           <a:solidFill>
                             <a:srgbClr val="1F2937"/>
                           </a:solidFill>
@@ -19736,7 +19736,7 @@
                         </a:rPr>
                         <a:t>토</a:t>
                       </a:r>
-                      <a:endParaRPr lang="en-US" sz="2400" dirty="0">
+                      <a:endParaRPr lang="en-US" sz="2600" dirty="0">
                         <a:latin typeface="맑은 고딕" charset="0"/>
                         <a:ea typeface="맑은 고딕" charset="0"/>
                         <a:cs typeface="맑은 고딕" charset="0"/>
@@ -19786,7 +19786,7 @@
                   </a:tcPr>
                 </a:tc>
               </a:tr>
-              <a:tr h="487680">
+              <a:tr h="511810">
                 <a:tc>
                   <a:txBody>
                     <a:bodyPr/>
@@ -19795,7 +19795,7 @@
                       <a:pPr eaLnBrk="0" algn="ctr" indent="0" marL="0">
                         <a:buNone/>
                       </a:pPr>
-                      <a:endParaRPr lang="en-US" sz="2400" dirty="0">
+                      <a:endParaRPr lang="en-US" sz="2600" dirty="0">
                         <a:latin typeface="맑은 고딕" charset="0"/>
                         <a:ea typeface="맑은 고딕" charset="0"/>
                         <a:cs typeface="맑은 고딕" charset="0"/>
@@ -19852,7 +19852,7 @@
                       <a:pPr eaLnBrk="0" algn="ctr" indent="0" marL="0">
                         <a:buNone/>
                       </a:pPr>
-                      <a:endParaRPr lang="en-US" sz="2400" dirty="0">
+                      <a:endParaRPr lang="en-US" sz="2600" dirty="0">
                         <a:latin typeface="맑은 고딕" charset="0"/>
                         <a:ea typeface="맑은 고딕" charset="0"/>
                         <a:cs typeface="맑은 고딕" charset="0"/>
@@ -19909,7 +19909,7 @@
                       <a:pPr eaLnBrk="0" algn="ctr" indent="0" marL="0">
                         <a:buNone/>
                       </a:pPr>
-                      <a:endParaRPr lang="en-US" sz="2400" dirty="0">
+                      <a:endParaRPr lang="en-US" sz="2600" dirty="0">
                         <a:latin typeface="맑은 고딕" charset="0"/>
                         <a:ea typeface="맑은 고딕" charset="0"/>
                         <a:cs typeface="맑은 고딕" charset="0"/>
@@ -19967,7 +19967,7 @@
                         <a:buNone/>
                       </a:pPr>
                       <a:r>
-                        <a:rPr lang="en-US" sz="2400" dirty="0">
+                        <a:rPr lang="en-US" sz="2600" dirty="0">
                           <a:solidFill>
                             <a:srgbClr val="1F2937"/>
                           </a:solidFill>
@@ -19977,7 +19977,7 @@
                         </a:rPr>
                         <a:t>1</a:t>
                       </a:r>
-                      <a:endParaRPr lang="en-US" sz="2400" dirty="0">
+                      <a:endParaRPr lang="en-US" sz="2600" dirty="0">
                         <a:latin typeface="맑은 고딕" charset="0"/>
                         <a:ea typeface="맑은 고딕" charset="0"/>
                         <a:cs typeface="맑은 고딕" charset="0"/>
@@ -20035,7 +20035,7 @@
                         <a:buNone/>
                       </a:pPr>
                       <a:r>
-                        <a:rPr lang="en-US" sz="2400" dirty="0">
+                        <a:rPr lang="en-US" sz="2600" dirty="0">
                           <a:solidFill>
                             <a:srgbClr val="1F2937"/>
                           </a:solidFill>
@@ -20045,7 +20045,7 @@
                         </a:rPr>
                         <a:t>2</a:t>
                       </a:r>
-                      <a:endParaRPr lang="en-US" sz="2400" dirty="0">
+                      <a:endParaRPr lang="en-US" sz="2600" dirty="0">
                         <a:latin typeface="맑은 고딕" charset="0"/>
                         <a:ea typeface="맑은 고딕" charset="0"/>
                         <a:cs typeface="맑은 고딕" charset="0"/>
@@ -20103,7 +20103,7 @@
                         <a:buNone/>
                       </a:pPr>
                       <a:r>
-                        <a:rPr lang="en-US" sz="2400" dirty="0">
+                        <a:rPr lang="en-US" sz="2600" dirty="0">
                           <a:solidFill>
                             <a:srgbClr val="1F2937"/>
                           </a:solidFill>
@@ -20113,7 +20113,7 @@
                         </a:rPr>
                         <a:t>3</a:t>
                       </a:r>
-                      <a:endParaRPr lang="en-US" sz="2400" dirty="0">
+                      <a:endParaRPr lang="en-US" sz="2600" dirty="0">
                         <a:latin typeface="맑은 고딕" charset="0"/>
                         <a:ea typeface="맑은 고딕" charset="0"/>
                         <a:cs typeface="맑은 고딕" charset="0"/>
@@ -20171,7 +20171,7 @@
                         <a:buNone/>
                       </a:pPr>
                       <a:r>
-                        <a:rPr lang="en-US" sz="2400" dirty="0">
+                        <a:rPr lang="en-US" sz="2600" dirty="0">
                           <a:solidFill>
                             <a:srgbClr val="1F2937"/>
                           </a:solidFill>
@@ -20181,7 +20181,7 @@
                         </a:rPr>
                         <a:t>4</a:t>
                       </a:r>
-                      <a:endParaRPr lang="en-US" sz="2400" dirty="0">
+                      <a:endParaRPr lang="en-US" sz="2600" dirty="0">
                         <a:latin typeface="맑은 고딕" charset="0"/>
                         <a:ea typeface="맑은 고딕" charset="0"/>
                         <a:cs typeface="맑은 고딕" charset="0"/>
@@ -20231,7 +20231,7 @@
                   </a:tcPr>
                 </a:tc>
               </a:tr>
-              <a:tr h="487680">
+              <a:tr h="511810">
                 <a:tc>
                   <a:txBody>
                     <a:bodyPr/>
@@ -20241,7 +20241,7 @@
                         <a:buNone/>
                       </a:pPr>
                       <a:r>
-                        <a:rPr lang="en-US" sz="2400" dirty="0">
+                        <a:rPr lang="en-US" sz="2600" dirty="0">
                           <a:solidFill>
                             <a:srgbClr val="1F2937"/>
                           </a:solidFill>
@@ -20251,7 +20251,7 @@
                         </a:rPr>
                         <a:t>5</a:t>
                       </a:r>
-                      <a:endParaRPr lang="en-US" sz="2400" dirty="0">
+                      <a:endParaRPr lang="en-US" sz="2600" dirty="0">
                         <a:latin typeface="맑은 고딕" charset="0"/>
                         <a:ea typeface="맑은 고딕" charset="0"/>
                         <a:cs typeface="맑은 고딕" charset="0"/>
@@ -20309,7 +20309,7 @@
                         <a:buNone/>
                       </a:pPr>
                       <a:r>
-                        <a:rPr lang="en-US" sz="2400" dirty="0">
+                        <a:rPr lang="en-US" sz="2600" dirty="0">
                           <a:solidFill>
                             <a:srgbClr val="1F2937"/>
                           </a:solidFill>
@@ -20319,7 +20319,7 @@
                         </a:rPr>
                         <a:t>6</a:t>
                       </a:r>
-                      <a:endParaRPr lang="en-US" sz="2400" dirty="0">
+                      <a:endParaRPr lang="en-US" sz="2600" dirty="0">
                         <a:latin typeface="맑은 고딕" charset="0"/>
                         <a:ea typeface="맑은 고딕" charset="0"/>
                         <a:cs typeface="맑은 고딕" charset="0"/>
@@ -20377,7 +20377,7 @@
                         <a:buNone/>
                       </a:pPr>
                       <a:r>
-                        <a:rPr lang="en-US" sz="2400" dirty="0">
+                        <a:rPr lang="en-US" sz="2600" dirty="0">
                           <a:solidFill>
                             <a:srgbClr val="1F2937"/>
                           </a:solidFill>
@@ -20387,7 +20387,7 @@
                         </a:rPr>
                         <a:t>7</a:t>
                       </a:r>
-                      <a:endParaRPr lang="en-US" sz="2400" dirty="0">
+                      <a:endParaRPr lang="en-US" sz="2600" dirty="0">
                         <a:latin typeface="맑은 고딕" charset="0"/>
                         <a:ea typeface="맑은 고딕" charset="0"/>
                         <a:cs typeface="맑은 고딕" charset="0"/>
@@ -20445,7 +20445,7 @@
                         <a:buNone/>
                       </a:pPr>
                       <a:r>
-                        <a:rPr lang="en-US" sz="2400" dirty="0">
+                        <a:rPr lang="en-US" sz="2600" dirty="0">
                           <a:solidFill>
                             <a:srgbClr val="1F2937"/>
                           </a:solidFill>
@@ -20455,7 +20455,7 @@
                         </a:rPr>
                         <a:t>8</a:t>
                       </a:r>
-                      <a:endParaRPr lang="en-US" sz="2400" dirty="0">
+                      <a:endParaRPr lang="en-US" sz="2600" dirty="0">
                         <a:latin typeface="맑은 고딕" charset="0"/>
                         <a:ea typeface="맑은 고딕" charset="0"/>
                         <a:cs typeface="맑은 고딕" charset="0"/>
@@ -20513,7 +20513,7 @@
                         <a:buNone/>
                       </a:pPr>
                       <a:r>
-                        <a:rPr lang="en-US" sz="2400" dirty="0">
+                        <a:rPr lang="en-US" sz="2600" dirty="0">
                           <a:solidFill>
                             <a:srgbClr val="1F2937"/>
                           </a:solidFill>
@@ -20523,7 +20523,7 @@
                         </a:rPr>
                         <a:t>9</a:t>
                       </a:r>
-                      <a:endParaRPr lang="en-US" sz="2400" dirty="0">
+                      <a:endParaRPr lang="en-US" sz="2600" dirty="0">
                         <a:latin typeface="맑은 고딕" charset="0"/>
                         <a:ea typeface="맑은 고딕" charset="0"/>
                         <a:cs typeface="맑은 고딕" charset="0"/>
@@ -20581,7 +20581,7 @@
                         <a:buNone/>
                       </a:pPr>
                       <a:r>
-                        <a:rPr lang="en-US" sz="2400" dirty="0">
+                        <a:rPr lang="en-US" sz="2600" dirty="0">
                           <a:solidFill>
                             <a:srgbClr val="1F2937"/>
                           </a:solidFill>
@@ -20591,7 +20591,7 @@
                         </a:rPr>
                         <a:t>10</a:t>
                       </a:r>
-                      <a:endParaRPr lang="en-US" sz="2400" dirty="0">
+                      <a:endParaRPr lang="en-US" sz="2600" dirty="0">
                         <a:latin typeface="맑은 고딕" charset="0"/>
                         <a:ea typeface="맑은 고딕" charset="0"/>
                         <a:cs typeface="맑은 고딕" charset="0"/>
@@ -20649,7 +20649,7 @@
                         <a:buNone/>
                       </a:pPr>
                       <a:r>
-                        <a:rPr lang="en-US" sz="2400" dirty="0">
+                        <a:rPr lang="en-US" sz="2600" dirty="0">
                           <a:solidFill>
                             <a:srgbClr val="1F2937"/>
                           </a:solidFill>
@@ -20659,7 +20659,7 @@
                         </a:rPr>
                         <a:t>11</a:t>
                       </a:r>
-                      <a:endParaRPr lang="en-US" sz="2400" dirty="0">
+                      <a:endParaRPr lang="en-US" sz="2600" dirty="0">
                         <a:latin typeface="맑은 고딕" charset="0"/>
                         <a:ea typeface="맑은 고딕" charset="0"/>
                         <a:cs typeface="맑은 고딕" charset="0"/>
@@ -20709,7 +20709,7 @@
                   </a:tcPr>
                 </a:tc>
               </a:tr>
-              <a:tr h="487680">
+              <a:tr h="511810">
                 <a:tc>
                   <a:txBody>
                     <a:bodyPr/>
@@ -20719,7 +20719,7 @@
                         <a:buNone/>
                       </a:pPr>
                       <a:r>
-                        <a:rPr lang="en-US" sz="2400" dirty="0">
+                        <a:rPr lang="en-US" sz="2600" dirty="0">
                           <a:solidFill>
                             <a:srgbClr val="1F2937"/>
                           </a:solidFill>
@@ -20729,7 +20729,7 @@
                         </a:rPr>
                         <a:t>12</a:t>
                       </a:r>
-                      <a:endParaRPr lang="en-US" sz="2400" dirty="0">
+                      <a:endParaRPr lang="en-US" sz="2600" dirty="0">
                         <a:latin typeface="맑은 고딕" charset="0"/>
                         <a:ea typeface="맑은 고딕" charset="0"/>
                         <a:cs typeface="맑은 고딕" charset="0"/>
@@ -20787,7 +20787,7 @@
                         <a:buNone/>
                       </a:pPr>
                       <a:r>
-                        <a:rPr lang="en-US" sz="2400" dirty="0">
+                        <a:rPr lang="en-US" sz="2600" dirty="0">
                           <a:solidFill>
                             <a:srgbClr val="1F2937"/>
                           </a:solidFill>
@@ -20797,7 +20797,7 @@
                         </a:rPr>
                         <a:t>13</a:t>
                       </a:r>
-                      <a:endParaRPr lang="en-US" sz="2400" dirty="0">
+                      <a:endParaRPr lang="en-US" sz="2600" dirty="0">
                         <a:latin typeface="맑은 고딕" charset="0"/>
                         <a:ea typeface="맑은 고딕" charset="0"/>
                         <a:cs typeface="맑은 고딕" charset="0"/>
@@ -20855,7 +20855,7 @@
                         <a:buNone/>
                       </a:pPr>
                       <a:r>
-                        <a:rPr lang="en-US" sz="2400" dirty="0">
+                        <a:rPr lang="en-US" sz="2600" dirty="0">
                           <a:solidFill>
                             <a:srgbClr val="1F2937"/>
                           </a:solidFill>
@@ -20865,7 +20865,7 @@
                         </a:rPr>
                         <a:t>14</a:t>
                       </a:r>
-                      <a:endParaRPr lang="en-US" sz="2400" dirty="0">
+                      <a:endParaRPr lang="en-US" sz="2600" dirty="0">
                         <a:latin typeface="맑은 고딕" charset="0"/>
                         <a:ea typeface="맑은 고딕" charset="0"/>
                         <a:cs typeface="맑은 고딕" charset="0"/>
@@ -20923,7 +20923,7 @@
                         <a:buNone/>
                       </a:pPr>
                       <a:r>
-                        <a:rPr lang="en-US" sz="2400" dirty="0">
+                        <a:rPr lang="en-US" sz="2600" dirty="0">
                           <a:solidFill>
                             <a:srgbClr val="1F2937"/>
                           </a:solidFill>
@@ -20933,7 +20933,7 @@
                         </a:rPr>
                         <a:t>15</a:t>
                       </a:r>
-                      <a:endParaRPr lang="en-US" sz="2400" dirty="0">
+                      <a:endParaRPr lang="en-US" sz="2600" dirty="0">
                         <a:latin typeface="맑은 고딕" charset="0"/>
                         <a:ea typeface="맑은 고딕" charset="0"/>
                         <a:cs typeface="맑은 고딕" charset="0"/>
@@ -20991,7 +20991,7 @@
                         <a:buNone/>
                       </a:pPr>
                       <a:r>
-                        <a:rPr lang="en-US" sz="2400" dirty="0">
+                        <a:rPr lang="en-US" sz="2600" dirty="0">
                           <a:solidFill>
                             <a:srgbClr val="1F2937"/>
                           </a:solidFill>
@@ -21001,7 +21001,7 @@
                         </a:rPr>
                         <a:t>16</a:t>
                       </a:r>
-                      <a:endParaRPr lang="en-US" sz="2400" dirty="0">
+                      <a:endParaRPr lang="en-US" sz="2600" dirty="0">
                         <a:latin typeface="맑은 고딕" charset="0"/>
                         <a:ea typeface="맑은 고딕" charset="0"/>
                         <a:cs typeface="맑은 고딕" charset="0"/>
@@ -21059,7 +21059,7 @@
                         <a:buNone/>
                       </a:pPr>
                       <a:r>
-                        <a:rPr lang="en-US" sz="2400" dirty="0">
+                        <a:rPr lang="en-US" sz="2600" dirty="0">
                           <a:solidFill>
                             <a:srgbClr val="1F2937"/>
                           </a:solidFill>
@@ -21069,7 +21069,7 @@
                         </a:rPr>
                         <a:t>17</a:t>
                       </a:r>
-                      <a:endParaRPr lang="en-US" sz="2400" dirty="0">
+                      <a:endParaRPr lang="en-US" sz="2600" dirty="0">
                         <a:latin typeface="맑은 고딕" charset="0"/>
                         <a:ea typeface="맑은 고딕" charset="0"/>
                         <a:cs typeface="맑은 고딕" charset="0"/>
@@ -21127,7 +21127,7 @@
                         <a:buNone/>
                       </a:pPr>
                       <a:r>
-                        <a:rPr lang="en-US" sz="2400" dirty="0">
+                        <a:rPr lang="en-US" sz="2600" dirty="0">
                           <a:solidFill>
                             <a:srgbClr val="1F2937"/>
                           </a:solidFill>
@@ -21137,7 +21137,7 @@
                         </a:rPr>
                         <a:t>18</a:t>
                       </a:r>
-                      <a:endParaRPr lang="en-US" sz="2400" dirty="0">
+                      <a:endParaRPr lang="en-US" sz="2600" dirty="0">
                         <a:latin typeface="맑은 고딕" charset="0"/>
                         <a:ea typeface="맑은 고딕" charset="0"/>
                         <a:cs typeface="맑은 고딕" charset="0"/>
@@ -21187,7 +21187,7 @@
                   </a:tcPr>
                 </a:tc>
               </a:tr>
-              <a:tr h="487680">
+              <a:tr h="511810">
                 <a:tc>
                   <a:txBody>
                     <a:bodyPr/>
@@ -21197,7 +21197,7 @@
                         <a:buNone/>
                       </a:pPr>
                       <a:r>
-                        <a:rPr lang="en-US" sz="2400" dirty="0">
+                        <a:rPr lang="en-US" sz="2600" dirty="0">
                           <a:solidFill>
                             <a:srgbClr val="1F2937"/>
                           </a:solidFill>
@@ -21207,7 +21207,7 @@
                         </a:rPr>
                         <a:t>19</a:t>
                       </a:r>
-                      <a:endParaRPr lang="en-US" sz="2400" dirty="0">
+                      <a:endParaRPr lang="en-US" sz="2600" dirty="0">
                         <a:latin typeface="맑은 고딕" charset="0"/>
                         <a:ea typeface="맑은 고딕" charset="0"/>
                         <a:cs typeface="맑은 고딕" charset="0"/>
@@ -21265,7 +21265,7 @@
                         <a:buNone/>
                       </a:pPr>
                       <a:r>
-                        <a:rPr lang="en-US" sz="2400" dirty="0">
+                        <a:rPr lang="en-US" sz="2600" dirty="0">
                           <a:solidFill>
                             <a:srgbClr val="1F2937"/>
                           </a:solidFill>
@@ -21275,7 +21275,7 @@
                         </a:rPr>
                         <a:t>20</a:t>
                       </a:r>
-                      <a:endParaRPr lang="en-US" sz="2400" dirty="0">
+                      <a:endParaRPr lang="en-US" sz="2600" dirty="0">
                         <a:latin typeface="맑은 고딕" charset="0"/>
                         <a:ea typeface="맑은 고딕" charset="0"/>
                         <a:cs typeface="맑은 고딕" charset="0"/>
@@ -21333,7 +21333,7 @@
                         <a:buNone/>
                       </a:pPr>
                       <a:r>
-                        <a:rPr lang="en-US" sz="2400" dirty="0">
+                        <a:rPr lang="en-US" sz="2600" dirty="0">
                           <a:solidFill>
                             <a:srgbClr val="1F2937"/>
                           </a:solidFill>
@@ -21343,7 +21343,7 @@
                         </a:rPr>
                         <a:t>21</a:t>
                       </a:r>
-                      <a:endParaRPr lang="en-US" sz="2400" dirty="0">
+                      <a:endParaRPr lang="en-US" sz="2600" dirty="0">
                         <a:latin typeface="맑은 고딕" charset="0"/>
                         <a:ea typeface="맑은 고딕" charset="0"/>
                         <a:cs typeface="맑은 고딕" charset="0"/>
@@ -21401,7 +21401,7 @@
                         <a:buNone/>
                       </a:pPr>
                       <a:r>
-                        <a:rPr lang="en-US" sz="2400" dirty="0">
+                        <a:rPr lang="en-US" sz="2600" dirty="0">
                           <a:solidFill>
                             <a:srgbClr val="1F2937"/>
                           </a:solidFill>
@@ -21411,7 +21411,7 @@
                         </a:rPr>
                         <a:t>22</a:t>
                       </a:r>
-                      <a:endParaRPr lang="en-US" sz="2400" dirty="0">
+                      <a:endParaRPr lang="en-US" sz="2600" dirty="0">
                         <a:latin typeface="맑은 고딕" charset="0"/>
                         <a:ea typeface="맑은 고딕" charset="0"/>
                         <a:cs typeface="맑은 고딕" charset="0"/>
@@ -21469,7 +21469,7 @@
                         <a:buNone/>
                       </a:pPr>
                       <a:r>
-                        <a:rPr lang="en-US" sz="2400" dirty="0">
+                        <a:rPr lang="en-US" sz="2600" dirty="0">
                           <a:solidFill>
                             <a:srgbClr val="1F2937"/>
                           </a:solidFill>
@@ -21479,7 +21479,7 @@
                         </a:rPr>
                         <a:t>23</a:t>
                       </a:r>
-                      <a:endParaRPr lang="en-US" sz="2400" dirty="0">
+                      <a:endParaRPr lang="en-US" sz="2600" dirty="0">
                         <a:latin typeface="맑은 고딕" charset="0"/>
                         <a:ea typeface="맑은 고딕" charset="0"/>
                         <a:cs typeface="맑은 고딕" charset="0"/>
@@ -21537,7 +21537,7 @@
                         <a:buNone/>
                       </a:pPr>
                       <a:r>
-                        <a:rPr lang="en-US" sz="2400" dirty="0">
+                        <a:rPr lang="en-US" sz="2600" dirty="0">
                           <a:solidFill>
                             <a:srgbClr val="1F2937"/>
                           </a:solidFill>
@@ -21547,7 +21547,7 @@
                         </a:rPr>
                         <a:t>24</a:t>
                       </a:r>
-                      <a:endParaRPr lang="en-US" sz="2400" dirty="0">
+                      <a:endParaRPr lang="en-US" sz="2600" dirty="0">
                         <a:latin typeface="맑은 고딕" charset="0"/>
                         <a:ea typeface="맑은 고딕" charset="0"/>
                         <a:cs typeface="맑은 고딕" charset="0"/>
@@ -21605,7 +21605,7 @@
                         <a:buNone/>
                       </a:pPr>
                       <a:r>
-                        <a:rPr lang="en-US" sz="2400" dirty="0">
+                        <a:rPr lang="en-US" sz="2600" dirty="0">
                           <a:solidFill>
                             <a:srgbClr val="1F2937"/>
                           </a:solidFill>
@@ -21615,7 +21615,7 @@
                         </a:rPr>
                         <a:t>25</a:t>
                       </a:r>
-                      <a:endParaRPr lang="en-US" sz="2400" dirty="0">
+                      <a:endParaRPr lang="en-US" sz="2600" dirty="0">
                         <a:latin typeface="맑은 고딕" charset="0"/>
                         <a:ea typeface="맑은 고딕" charset="0"/>
                         <a:cs typeface="맑은 고딕" charset="0"/>
@@ -21665,7 +21665,7 @@
                   </a:tcPr>
                 </a:tc>
               </a:tr>
-              <a:tr h="487680">
+              <a:tr h="511810">
                 <a:tc>
                   <a:txBody>
                     <a:bodyPr/>
@@ -21675,7 +21675,7 @@
                         <a:buNone/>
                       </a:pPr>
                       <a:r>
-                        <a:rPr lang="en-US" sz="2400" dirty="0">
+                        <a:rPr lang="en-US" sz="2600" dirty="0">
                           <a:solidFill>
                             <a:srgbClr val="1F2937"/>
                           </a:solidFill>
@@ -21685,7 +21685,7 @@
                         </a:rPr>
                         <a:t>26</a:t>
                       </a:r>
-                      <a:endParaRPr lang="en-US" sz="2400" dirty="0">
+                      <a:endParaRPr lang="en-US" sz="2600" dirty="0">
                         <a:latin typeface="맑은 고딕" charset="0"/>
                         <a:ea typeface="맑은 고딕" charset="0"/>
                         <a:cs typeface="맑은 고딕" charset="0"/>
@@ -21743,7 +21743,7 @@
                         <a:buNone/>
                       </a:pPr>
                       <a:r>
-                        <a:rPr lang="en-US" sz="2400" dirty="0">
+                        <a:rPr lang="en-US" sz="2600" dirty="0">
                           <a:solidFill>
                             <a:srgbClr val="1F2937"/>
                           </a:solidFill>
@@ -21753,7 +21753,7 @@
                         </a:rPr>
                         <a:t>27</a:t>
                       </a:r>
-                      <a:endParaRPr lang="en-US" sz="2400" dirty="0">
+                      <a:endParaRPr lang="en-US" sz="2600" dirty="0">
                         <a:latin typeface="맑은 고딕" charset="0"/>
                         <a:ea typeface="맑은 고딕" charset="0"/>
                         <a:cs typeface="맑은 고딕" charset="0"/>
@@ -21811,7 +21811,7 @@
                         <a:buNone/>
                       </a:pPr>
                       <a:r>
-                        <a:rPr lang="en-US" sz="2400" dirty="0">
+                        <a:rPr lang="en-US" sz="2600" dirty="0">
                           <a:solidFill>
                             <a:srgbClr val="1F2937"/>
                           </a:solidFill>
@@ -21821,7 +21821,7 @@
                         </a:rPr>
                         <a:t>28</a:t>
                       </a:r>
-                      <a:endParaRPr lang="en-US" sz="2400" dirty="0">
+                      <a:endParaRPr lang="en-US" sz="2600" dirty="0">
                         <a:latin typeface="맑은 고딕" charset="0"/>
                         <a:ea typeface="맑은 고딕" charset="0"/>
                         <a:cs typeface="맑은 고딕" charset="0"/>
@@ -21879,7 +21879,7 @@
                         <a:buNone/>
                       </a:pPr>
                       <a:r>
-                        <a:rPr lang="en-US" sz="2400" dirty="0">
+                        <a:rPr lang="en-US" sz="2600" dirty="0">
                           <a:solidFill>
                             <a:srgbClr val="1F2937"/>
                           </a:solidFill>
@@ -21889,7 +21889,7 @@
                         </a:rPr>
                         <a:t>29</a:t>
                       </a:r>
-                      <a:endParaRPr lang="en-US" sz="2400" dirty="0">
+                      <a:endParaRPr lang="en-US" sz="2600" dirty="0">
                         <a:latin typeface="맑은 고딕" charset="0"/>
                         <a:ea typeface="맑은 고딕" charset="0"/>
                         <a:cs typeface="맑은 고딕" charset="0"/>
@@ -21947,7 +21947,7 @@
                         <a:buNone/>
                       </a:pPr>
                       <a:r>
-                        <a:rPr lang="en-US" sz="2400" dirty="0">
+                        <a:rPr lang="en-US" sz="2600" dirty="0">
                           <a:solidFill>
                             <a:srgbClr val="1F2937"/>
                           </a:solidFill>
@@ -21957,7 +21957,7 @@
                         </a:rPr>
                         <a:t>30</a:t>
                       </a:r>
-                      <a:endParaRPr lang="en-US" sz="2400" dirty="0">
+                      <a:endParaRPr lang="en-US" sz="2600" dirty="0">
                         <a:latin typeface="맑은 고딕" charset="0"/>
                         <a:ea typeface="맑은 고딕" charset="0"/>
                         <a:cs typeface="맑은 고딕" charset="0"/>
@@ -22014,7 +22014,7 @@
                       <a:pPr eaLnBrk="0" algn="ctr" indent="0" marL="0">
                         <a:buNone/>
                       </a:pPr>
-                      <a:endParaRPr lang="en-US" sz="2400" dirty="0">
+                      <a:endParaRPr lang="en-US" sz="2600" dirty="0">
                         <a:latin typeface="맑은 고딕" charset="0"/>
                         <a:ea typeface="맑은 고딕" charset="0"/>
                         <a:cs typeface="맑은 고딕" charset="0"/>
@@ -22071,7 +22071,7 @@
                       <a:pPr eaLnBrk="0" algn="ctr" indent="0" marL="0">
                         <a:buNone/>
                       </a:pPr>
-                      <a:endParaRPr lang="en-US" sz="2400" dirty="0">
+                      <a:endParaRPr lang="en-US" sz="2600" dirty="0">
                         <a:latin typeface="맑은 고딕" charset="0"/>
                         <a:ea typeface="맑은 고딕" charset="0"/>
                         <a:cs typeface="맑은 고딕" charset="0"/>
@@ -24280,7 +24280,7 @@
           </p:nvPr>
         </p:nvGraphicFramePr>
         <p:xfrm>
-          <a:off x="1248156" y="2509520"/>
+          <a:off x="1248156" y="2542540"/>
           <a:ext cx="9692640" cy="914400"/>
         </p:xfrm>
         <a:graphic>
@@ -24291,7 +24291,7 @@
                 <a:gridCol w="3101645"/>
                 <a:gridCol w="6590995"/>
               </a:tblGrid>
-              <a:tr h="528320">
+              <a:tr h="511810">
                 <a:tc>
                   <a:txBody>
                     <a:bodyPr/>
@@ -24429,7 +24429,7 @@
                   </a:tcPr>
                 </a:tc>
               </a:tr>
-              <a:tr h="528320">
+              <a:tr h="511810">
                 <a:tc>
                   <a:txBody>
                     <a:bodyPr/>
@@ -24567,7 +24567,7 @@
                   </a:tcPr>
                 </a:tc>
               </a:tr>
-              <a:tr h="528320">
+              <a:tr h="511810">
                 <a:tc>
                   <a:txBody>
                     <a:bodyPr/>
@@ -24705,7 +24705,7 @@
                   </a:tcPr>
                 </a:tc>
               </a:tr>
-              <a:tr h="528320">
+              <a:tr h="511810">
                 <a:tc>
                   <a:txBody>
                     <a:bodyPr/>
